--- a/PPNJ/dashboard/Guide Dashbaord/bg creation.pptx
+++ b/PPNJ/dashboard/Guide Dashbaord/bg creation.pptx
@@ -262,7 +262,7 @@
           <a:p>
             <a:fld id="{21F19ACD-48F4-409C-8597-BFCE65646A84}" type="datetimeFigureOut">
               <a:rPr lang="en-MY" smtClean="0"/>
-              <a:t>17/7/2025</a:t>
+              <a:t>14/8/2025</a:t>
             </a:fld>
             <a:endParaRPr lang="en-MY"/>
           </a:p>
@@ -462,7 +462,7 @@
           <a:p>
             <a:fld id="{21F19ACD-48F4-409C-8597-BFCE65646A84}" type="datetimeFigureOut">
               <a:rPr lang="en-MY" smtClean="0"/>
-              <a:t>17/7/2025</a:t>
+              <a:t>14/8/2025</a:t>
             </a:fld>
             <a:endParaRPr lang="en-MY"/>
           </a:p>
@@ -672,7 +672,7 @@
           <a:p>
             <a:fld id="{21F19ACD-48F4-409C-8597-BFCE65646A84}" type="datetimeFigureOut">
               <a:rPr lang="en-MY" smtClean="0"/>
-              <a:t>17/7/2025</a:t>
+              <a:t>14/8/2025</a:t>
             </a:fld>
             <a:endParaRPr lang="en-MY"/>
           </a:p>
@@ -872,7 +872,7 @@
           <a:p>
             <a:fld id="{21F19ACD-48F4-409C-8597-BFCE65646A84}" type="datetimeFigureOut">
               <a:rPr lang="en-MY" smtClean="0"/>
-              <a:t>17/7/2025</a:t>
+              <a:t>14/8/2025</a:t>
             </a:fld>
             <a:endParaRPr lang="en-MY"/>
           </a:p>
@@ -1148,7 +1148,7 @@
           <a:p>
             <a:fld id="{21F19ACD-48F4-409C-8597-BFCE65646A84}" type="datetimeFigureOut">
               <a:rPr lang="en-MY" smtClean="0"/>
-              <a:t>17/7/2025</a:t>
+              <a:t>14/8/2025</a:t>
             </a:fld>
             <a:endParaRPr lang="en-MY"/>
           </a:p>
@@ -1416,7 +1416,7 @@
           <a:p>
             <a:fld id="{21F19ACD-48F4-409C-8597-BFCE65646A84}" type="datetimeFigureOut">
               <a:rPr lang="en-MY" smtClean="0"/>
-              <a:t>17/7/2025</a:t>
+              <a:t>14/8/2025</a:t>
             </a:fld>
             <a:endParaRPr lang="en-MY"/>
           </a:p>
@@ -1831,7 +1831,7 @@
           <a:p>
             <a:fld id="{21F19ACD-48F4-409C-8597-BFCE65646A84}" type="datetimeFigureOut">
               <a:rPr lang="en-MY" smtClean="0"/>
-              <a:t>17/7/2025</a:t>
+              <a:t>14/8/2025</a:t>
             </a:fld>
             <a:endParaRPr lang="en-MY"/>
           </a:p>
@@ -1973,7 +1973,7 @@
           <a:p>
             <a:fld id="{21F19ACD-48F4-409C-8597-BFCE65646A84}" type="datetimeFigureOut">
               <a:rPr lang="en-MY" smtClean="0"/>
-              <a:t>17/7/2025</a:t>
+              <a:t>14/8/2025</a:t>
             </a:fld>
             <a:endParaRPr lang="en-MY"/>
           </a:p>
@@ -2086,7 +2086,7 @@
           <a:p>
             <a:fld id="{21F19ACD-48F4-409C-8597-BFCE65646A84}" type="datetimeFigureOut">
               <a:rPr lang="en-MY" smtClean="0"/>
-              <a:t>17/7/2025</a:t>
+              <a:t>14/8/2025</a:t>
             </a:fld>
             <a:endParaRPr lang="en-MY"/>
           </a:p>
@@ -2399,7 +2399,7 @@
           <a:p>
             <a:fld id="{21F19ACD-48F4-409C-8597-BFCE65646A84}" type="datetimeFigureOut">
               <a:rPr lang="en-MY" smtClean="0"/>
-              <a:t>17/7/2025</a:t>
+              <a:t>14/8/2025</a:t>
             </a:fld>
             <a:endParaRPr lang="en-MY"/>
           </a:p>
@@ -2688,7 +2688,7 @@
           <a:p>
             <a:fld id="{21F19ACD-48F4-409C-8597-BFCE65646A84}" type="datetimeFigureOut">
               <a:rPr lang="en-MY" smtClean="0"/>
-              <a:t>17/7/2025</a:t>
+              <a:t>14/8/2025</a:t>
             </a:fld>
             <a:endParaRPr lang="en-MY"/>
           </a:p>
@@ -2931,7 +2931,7 @@
           <a:p>
             <a:fld id="{21F19ACD-48F4-409C-8597-BFCE65646A84}" type="datetimeFigureOut">
               <a:rPr lang="en-MY" smtClean="0"/>
-              <a:t>17/7/2025</a:t>
+              <a:t>14/8/2025</a:t>
             </a:fld>
             <a:endParaRPr lang="en-MY"/>
           </a:p>
@@ -3362,8 +3362,8 @@
         </p:nvSpPr>
         <p:spPr>
           <a:xfrm>
-            <a:off x="696000" y="279000"/>
-            <a:ext cx="10800000" cy="6300000"/>
+            <a:off x="133165" y="279000"/>
+            <a:ext cx="11362835" cy="6300000"/>
           </a:xfrm>
           <a:prstGeom prst="roundRect">
             <a:avLst>
@@ -3428,7 +3428,7 @@
         </p:nvGrpSpPr>
         <p:grpSpPr>
           <a:xfrm>
-            <a:off x="2876982" y="1320362"/>
+            <a:off x="1546738" y="680802"/>
             <a:ext cx="1800000" cy="1260000"/>
             <a:chOff x="2067600" y="1281145"/>
             <a:chExt cx="1800000" cy="1260000"/>
@@ -3581,78 +3581,6 @@
           </p:txBody>
         </p:sp>
       </p:grpSp>
-      <p:sp>
-        <p:nvSpPr>
-          <p:cNvPr id="12" name="Rectangle: Rounded Corners 11">
-            <a:extLst>
-              <a:ext uri="{FF2B5EF4-FFF2-40B4-BE49-F238E27FC236}">
-                <a16:creationId xmlns:a16="http://schemas.microsoft.com/office/drawing/2014/main" id="{CB7CD0B2-2071-251F-9112-1AA6D2707803}"/>
-              </a:ext>
-            </a:extLst>
-          </p:cNvPr>
-          <p:cNvSpPr/>
-          <p:nvPr/>
-        </p:nvSpPr>
-        <p:spPr>
-          <a:xfrm>
-            <a:off x="243873" y="117762"/>
-            <a:ext cx="1800000" cy="6660000"/>
-          </a:xfrm>
-          <a:prstGeom prst="roundRect">
-            <a:avLst>
-              <a:gd name="adj" fmla="val 21741"/>
-            </a:avLst>
-          </a:prstGeom>
-          <a:gradFill>
-            <a:gsLst>
-              <a:gs pos="0">
-                <a:srgbClr val="377562"/>
-              </a:gs>
-              <a:gs pos="90000">
-                <a:srgbClr val="FFC000">
-                  <a:alpha val="58824"/>
-                </a:srgbClr>
-              </a:gs>
-            </a:gsLst>
-            <a:lin ang="2700000" scaled="0"/>
-          </a:gradFill>
-          <a:ln>
-            <a:noFill/>
-          </a:ln>
-          <a:effectLst>
-            <a:outerShdw blurRad="190500" dist="190500" dir="2700000" algn="tl" rotWithShape="0">
-              <a:schemeClr val="bg1">
-                <a:lumMod val="75000"/>
-                <a:alpha val="40000"/>
-              </a:schemeClr>
-            </a:outerShdw>
-          </a:effectLst>
-        </p:spPr>
-        <p:style>
-          <a:lnRef idx="2">
-            <a:schemeClr val="accent1">
-              <a:shade val="15000"/>
-            </a:schemeClr>
-          </a:lnRef>
-          <a:fillRef idx="1">
-            <a:schemeClr val="accent1"/>
-          </a:fillRef>
-          <a:effectRef idx="0">
-            <a:schemeClr val="accent1"/>
-          </a:effectRef>
-          <a:fontRef idx="minor">
-            <a:schemeClr val="lt1"/>
-          </a:fontRef>
-        </p:style>
-        <p:txBody>
-          <a:bodyPr rtlCol="0" anchor="ctr"/>
-          <a:lstStyle/>
-          <a:p>
-            <a:pPr algn="ctr"/>
-            <a:endParaRPr lang="en-MY"/>
-          </a:p>
-        </p:txBody>
-      </p:sp>
       <p:grpSp>
         <p:nvGrpSpPr>
           <p:cNvPr id="13" name="Group 12">
@@ -3667,7 +3595,7 @@
         </p:nvGrpSpPr>
         <p:grpSpPr>
           <a:xfrm>
-            <a:off x="4992788" y="1320362"/>
+            <a:off x="3675100" y="680802"/>
             <a:ext cx="1800000" cy="1260000"/>
             <a:chOff x="2067600" y="1281145"/>
             <a:chExt cx="1800000" cy="1260000"/>
@@ -3834,7 +3762,7 @@
         </p:nvGrpSpPr>
         <p:grpSpPr>
           <a:xfrm>
-            <a:off x="9224400" y="1269563"/>
+            <a:off x="7931824" y="680802"/>
             <a:ext cx="1800000" cy="1260000"/>
             <a:chOff x="2067600" y="1281145"/>
             <a:chExt cx="1800000" cy="1260000"/>
@@ -4001,7 +3929,7 @@
         </p:nvGrpSpPr>
         <p:grpSpPr>
           <a:xfrm>
-            <a:off x="7108594" y="1269563"/>
+            <a:off x="5803462" y="680802"/>
             <a:ext cx="1800000" cy="1260000"/>
             <a:chOff x="2067600" y="1281145"/>
             <a:chExt cx="1800000" cy="1260000"/>
@@ -4168,8 +4096,8 @@
         </p:nvGrpSpPr>
         <p:grpSpPr>
           <a:xfrm>
-            <a:off x="2876982" y="2992143"/>
-            <a:ext cx="8147418" cy="3186983"/>
+            <a:off x="250166" y="2086253"/>
+            <a:ext cx="11162581" cy="4305938"/>
             <a:chOff x="2067600" y="1281145"/>
             <a:chExt cx="1800000" cy="1260000"/>
           </a:xfrm>
@@ -4244,482 +4172,6 @@
               <a:extLst>
                 <a:ext uri="{FF2B5EF4-FFF2-40B4-BE49-F238E27FC236}">
                   <a16:creationId xmlns:a16="http://schemas.microsoft.com/office/drawing/2014/main" id="{FB2975C3-EF43-4ADF-B716-42532245F016}"/>
-                </a:ext>
-              </a:extLst>
-            </p:cNvPr>
-            <p:cNvSpPr/>
-            <p:nvPr/>
-          </p:nvSpPr>
-          <p:spPr>
-            <a:xfrm>
-              <a:off x="2067600" y="1281145"/>
-              <a:ext cx="1800000" cy="1260000"/>
-            </a:xfrm>
-            <a:prstGeom prst="roundRect">
-              <a:avLst>
-                <a:gd name="adj" fmla="val 21741"/>
-              </a:avLst>
-            </a:prstGeom>
-            <a:gradFill>
-              <a:gsLst>
-                <a:gs pos="100000">
-                  <a:schemeClr val="bg1"/>
-                </a:gs>
-                <a:gs pos="0">
-                  <a:srgbClr val="EDEEF3"/>
-                </a:gs>
-                <a:gs pos="100000">
-                  <a:schemeClr val="accent1">
-                    <a:lumMod val="45000"/>
-                    <a:lumOff val="55000"/>
-                  </a:schemeClr>
-                </a:gs>
-                <a:gs pos="100000">
-                  <a:schemeClr val="accent1">
-                    <a:lumMod val="30000"/>
-                    <a:lumOff val="70000"/>
-                  </a:schemeClr>
-                </a:gs>
-              </a:gsLst>
-              <a:lin ang="2700000" scaled="0"/>
-            </a:gradFill>
-            <a:ln>
-              <a:noFill/>
-            </a:ln>
-            <a:effectLst>
-              <a:outerShdw blurRad="190500" dist="190500" dir="2700000" algn="tl" rotWithShape="0">
-                <a:schemeClr val="bg1">
-                  <a:lumMod val="75000"/>
-                  <a:alpha val="40000"/>
-                </a:schemeClr>
-              </a:outerShdw>
-            </a:effectLst>
-          </p:spPr>
-          <p:style>
-            <a:lnRef idx="2">
-              <a:schemeClr val="accent1">
-                <a:shade val="15000"/>
-              </a:schemeClr>
-            </a:lnRef>
-            <a:fillRef idx="1">
-              <a:schemeClr val="accent1"/>
-            </a:fillRef>
-            <a:effectRef idx="0">
-              <a:schemeClr val="accent1"/>
-            </a:effectRef>
-            <a:fontRef idx="minor">
-              <a:schemeClr val="lt1"/>
-            </a:fontRef>
-          </p:style>
-          <p:txBody>
-            <a:bodyPr rtlCol="0" anchor="ctr"/>
-            <a:lstStyle/>
-            <a:p>
-              <a:pPr algn="ctr"/>
-              <a:endParaRPr lang="en-MY"/>
-            </a:p>
-          </p:txBody>
-        </p:sp>
-      </p:grpSp>
-      <p:grpSp>
-        <p:nvGrpSpPr>
-          <p:cNvPr id="9" name="Group 8">
-            <a:extLst>
-              <a:ext uri="{FF2B5EF4-FFF2-40B4-BE49-F238E27FC236}">
-                <a16:creationId xmlns:a16="http://schemas.microsoft.com/office/drawing/2014/main" id="{824D4969-DF3A-9ABB-E602-44DDFF5C6DD5}"/>
-              </a:ext>
-            </a:extLst>
-          </p:cNvPr>
-          <p:cNvGrpSpPr/>
-          <p:nvPr/>
-        </p:nvGrpSpPr>
-        <p:grpSpPr>
-          <a:xfrm>
-            <a:off x="92365" y="600362"/>
-            <a:ext cx="2022762" cy="1440000"/>
-            <a:chOff x="1887600" y="791944"/>
-            <a:chExt cx="2160000" cy="1440000"/>
-          </a:xfrm>
-          <a:solidFill>
-            <a:srgbClr val="F3F4F7"/>
-          </a:solidFill>
-        </p:grpSpPr>
-        <p:sp>
-          <p:nvSpPr>
-            <p:cNvPr id="11" name="Rectangle: Rounded Corners 10">
-              <a:extLst>
-                <a:ext uri="{FF2B5EF4-FFF2-40B4-BE49-F238E27FC236}">
-                  <a16:creationId xmlns:a16="http://schemas.microsoft.com/office/drawing/2014/main" id="{E99DC676-A904-CAC8-2B15-4BA51885F33D}"/>
-                </a:ext>
-              </a:extLst>
-            </p:cNvPr>
-            <p:cNvSpPr/>
-            <p:nvPr/>
-          </p:nvSpPr>
-          <p:spPr>
-            <a:xfrm>
-              <a:off x="1887600" y="791944"/>
-              <a:ext cx="2160000" cy="1440000"/>
-            </a:xfrm>
-            <a:prstGeom prst="roundRect">
-              <a:avLst>
-                <a:gd name="adj" fmla="val 21741"/>
-              </a:avLst>
-            </a:prstGeom>
-            <a:grpFill/>
-            <a:ln>
-              <a:noFill/>
-            </a:ln>
-            <a:effectLst>
-              <a:innerShdw blurRad="63500" dist="50800" dir="16200000">
-                <a:prstClr val="black">
-                  <a:alpha val="50000"/>
-                </a:prstClr>
-              </a:innerShdw>
-            </a:effectLst>
-          </p:spPr>
-          <p:style>
-            <a:lnRef idx="2">
-              <a:schemeClr val="accent1">
-                <a:shade val="15000"/>
-              </a:schemeClr>
-            </a:lnRef>
-            <a:fillRef idx="1">
-              <a:schemeClr val="accent1"/>
-            </a:fillRef>
-            <a:effectRef idx="0">
-              <a:schemeClr val="accent1"/>
-            </a:effectRef>
-            <a:fontRef idx="minor">
-              <a:schemeClr val="lt1"/>
-            </a:fontRef>
-          </p:style>
-          <p:txBody>
-            <a:bodyPr rtlCol="0" anchor="ctr"/>
-            <a:lstStyle/>
-            <a:p>
-              <a:pPr algn="ctr"/>
-              <a:endParaRPr lang="en-MY"/>
-            </a:p>
-          </p:txBody>
-        </p:sp>
-        <p:sp>
-          <p:nvSpPr>
-            <p:cNvPr id="10" name="Rectangle: Rounded Corners 9">
-              <a:extLst>
-                <a:ext uri="{FF2B5EF4-FFF2-40B4-BE49-F238E27FC236}">
-                  <a16:creationId xmlns:a16="http://schemas.microsoft.com/office/drawing/2014/main" id="{02B132D9-3863-5840-EC93-A3FAF547F057}"/>
-                </a:ext>
-              </a:extLst>
-            </p:cNvPr>
-            <p:cNvSpPr/>
-            <p:nvPr/>
-          </p:nvSpPr>
-          <p:spPr>
-            <a:xfrm>
-              <a:off x="2041135" y="881944"/>
-              <a:ext cx="1800001" cy="1260000"/>
-            </a:xfrm>
-            <a:prstGeom prst="roundRect">
-              <a:avLst>
-                <a:gd name="adj" fmla="val 21741"/>
-              </a:avLst>
-            </a:prstGeom>
-            <a:grpFill/>
-            <a:ln>
-              <a:noFill/>
-            </a:ln>
-            <a:effectLst>
-              <a:outerShdw blurRad="50800" dist="38100" dir="5400000" algn="t" rotWithShape="0">
-                <a:prstClr val="black">
-                  <a:alpha val="40000"/>
-                </a:prstClr>
-              </a:outerShdw>
-            </a:effectLst>
-          </p:spPr>
-          <p:style>
-            <a:lnRef idx="2">
-              <a:schemeClr val="accent1">
-                <a:shade val="15000"/>
-              </a:schemeClr>
-            </a:lnRef>
-            <a:fillRef idx="1">
-              <a:schemeClr val="accent1"/>
-            </a:fillRef>
-            <a:effectRef idx="0">
-              <a:schemeClr val="accent1"/>
-            </a:effectRef>
-            <a:fontRef idx="minor">
-              <a:schemeClr val="lt1"/>
-            </a:fontRef>
-          </p:style>
-          <p:txBody>
-            <a:bodyPr rtlCol="0" anchor="ctr"/>
-            <a:lstStyle/>
-            <a:p>
-              <a:pPr algn="ctr"/>
-              <a:endParaRPr lang="en-MY"/>
-            </a:p>
-          </p:txBody>
-        </p:sp>
-      </p:grpSp>
-      <p:grpSp>
-        <p:nvGrpSpPr>
-          <p:cNvPr id="25" name="Group 24">
-            <a:extLst>
-              <a:ext uri="{FF2B5EF4-FFF2-40B4-BE49-F238E27FC236}">
-                <a16:creationId xmlns:a16="http://schemas.microsoft.com/office/drawing/2014/main" id="{6E72EE6C-7D8D-BB1F-CF4C-3539C21B7C4F}"/>
-              </a:ext>
-            </a:extLst>
-          </p:cNvPr>
-          <p:cNvGrpSpPr/>
-          <p:nvPr/>
-        </p:nvGrpSpPr>
-        <p:grpSpPr>
-          <a:xfrm>
-            <a:off x="600364" y="2587872"/>
-            <a:ext cx="1006764" cy="1150364"/>
-            <a:chOff x="2067600" y="1281145"/>
-            <a:chExt cx="1800000" cy="1260000"/>
-          </a:xfrm>
-        </p:grpSpPr>
-        <p:sp>
-          <p:nvSpPr>
-            <p:cNvPr id="26" name="Rectangle: Rounded Corners 25">
-              <a:extLst>
-                <a:ext uri="{FF2B5EF4-FFF2-40B4-BE49-F238E27FC236}">
-                  <a16:creationId xmlns:a16="http://schemas.microsoft.com/office/drawing/2014/main" id="{24D81654-99E7-5635-4BA6-2A2D1E5F8848}"/>
-                </a:ext>
-              </a:extLst>
-            </p:cNvPr>
-            <p:cNvSpPr/>
-            <p:nvPr/>
-          </p:nvSpPr>
-          <p:spPr>
-            <a:xfrm>
-              <a:off x="2067600" y="1281145"/>
-              <a:ext cx="1800000" cy="1260000"/>
-            </a:xfrm>
-            <a:prstGeom prst="roundRect">
-              <a:avLst>
-                <a:gd name="adj" fmla="val 21741"/>
-              </a:avLst>
-            </a:prstGeom>
-            <a:solidFill>
-              <a:schemeClr val="tx1">
-                <a:lumMod val="65000"/>
-                <a:lumOff val="35000"/>
-              </a:schemeClr>
-            </a:solidFill>
-            <a:ln>
-              <a:noFill/>
-            </a:ln>
-            <a:effectLst>
-              <a:outerShdw blurRad="50800" dist="38100" dir="13500000" algn="br" rotWithShape="0">
-                <a:prstClr val="black">
-                  <a:alpha val="40000"/>
-                </a:prstClr>
-              </a:outerShdw>
-            </a:effectLst>
-          </p:spPr>
-          <p:style>
-            <a:lnRef idx="2">
-              <a:schemeClr val="accent1">
-                <a:shade val="15000"/>
-              </a:schemeClr>
-            </a:lnRef>
-            <a:fillRef idx="1">
-              <a:schemeClr val="accent1"/>
-            </a:fillRef>
-            <a:effectRef idx="0">
-              <a:schemeClr val="accent1"/>
-            </a:effectRef>
-            <a:fontRef idx="minor">
-              <a:schemeClr val="lt1"/>
-            </a:fontRef>
-          </p:style>
-          <p:txBody>
-            <a:bodyPr rtlCol="0" anchor="ctr"/>
-            <a:lstStyle/>
-            <a:p>
-              <a:pPr algn="ctr"/>
-              <a:endParaRPr lang="en-MY"/>
-            </a:p>
-          </p:txBody>
-        </p:sp>
-        <p:sp>
-          <p:nvSpPr>
-            <p:cNvPr id="27" name="Rectangle: Rounded Corners 26">
-              <a:extLst>
-                <a:ext uri="{FF2B5EF4-FFF2-40B4-BE49-F238E27FC236}">
-                  <a16:creationId xmlns:a16="http://schemas.microsoft.com/office/drawing/2014/main" id="{9110D0EC-0E81-4213-BB06-5E8A2FC234F3}"/>
-                </a:ext>
-              </a:extLst>
-            </p:cNvPr>
-            <p:cNvSpPr/>
-            <p:nvPr/>
-          </p:nvSpPr>
-          <p:spPr>
-            <a:xfrm>
-              <a:off x="2067600" y="1281145"/>
-              <a:ext cx="1800000" cy="1260000"/>
-            </a:xfrm>
-            <a:prstGeom prst="roundRect">
-              <a:avLst>
-                <a:gd name="adj" fmla="val 21741"/>
-              </a:avLst>
-            </a:prstGeom>
-            <a:gradFill>
-              <a:gsLst>
-                <a:gs pos="100000">
-                  <a:schemeClr val="bg1"/>
-                </a:gs>
-                <a:gs pos="0">
-                  <a:srgbClr val="EDEEF3"/>
-                </a:gs>
-                <a:gs pos="100000">
-                  <a:schemeClr val="accent1">
-                    <a:lumMod val="45000"/>
-                    <a:lumOff val="55000"/>
-                  </a:schemeClr>
-                </a:gs>
-                <a:gs pos="100000">
-                  <a:schemeClr val="accent1">
-                    <a:lumMod val="30000"/>
-                    <a:lumOff val="70000"/>
-                  </a:schemeClr>
-                </a:gs>
-              </a:gsLst>
-              <a:lin ang="2700000" scaled="0"/>
-            </a:gradFill>
-            <a:ln>
-              <a:noFill/>
-            </a:ln>
-            <a:effectLst>
-              <a:outerShdw blurRad="190500" dist="190500" dir="2700000" algn="tl" rotWithShape="0">
-                <a:schemeClr val="bg1">
-                  <a:lumMod val="75000"/>
-                  <a:alpha val="40000"/>
-                </a:schemeClr>
-              </a:outerShdw>
-            </a:effectLst>
-          </p:spPr>
-          <p:style>
-            <a:lnRef idx="2">
-              <a:schemeClr val="accent1">
-                <a:shade val="15000"/>
-              </a:schemeClr>
-            </a:lnRef>
-            <a:fillRef idx="1">
-              <a:schemeClr val="accent1"/>
-            </a:fillRef>
-            <a:effectRef idx="0">
-              <a:schemeClr val="accent1"/>
-            </a:effectRef>
-            <a:fontRef idx="minor">
-              <a:schemeClr val="lt1"/>
-            </a:fontRef>
-          </p:style>
-          <p:txBody>
-            <a:bodyPr rtlCol="0" anchor="ctr"/>
-            <a:lstStyle/>
-            <a:p>
-              <a:pPr algn="ctr"/>
-              <a:endParaRPr lang="en-MY"/>
-            </a:p>
-          </p:txBody>
-        </p:sp>
-      </p:grpSp>
-      <p:grpSp>
-        <p:nvGrpSpPr>
-          <p:cNvPr id="31" name="Group 30">
-            <a:extLst>
-              <a:ext uri="{FF2B5EF4-FFF2-40B4-BE49-F238E27FC236}">
-                <a16:creationId xmlns:a16="http://schemas.microsoft.com/office/drawing/2014/main" id="{694381CB-4BDD-BF0A-DBC1-1A6CD849A01D}"/>
-              </a:ext>
-            </a:extLst>
-          </p:cNvPr>
-          <p:cNvGrpSpPr/>
-          <p:nvPr/>
-        </p:nvGrpSpPr>
-        <p:grpSpPr>
-          <a:xfrm>
-            <a:off x="569354" y="4285746"/>
-            <a:ext cx="1006764" cy="1150364"/>
-            <a:chOff x="2067600" y="1281145"/>
-            <a:chExt cx="1800000" cy="1260000"/>
-          </a:xfrm>
-        </p:grpSpPr>
-        <p:sp>
-          <p:nvSpPr>
-            <p:cNvPr id="32" name="Rectangle: Rounded Corners 31">
-              <a:extLst>
-                <a:ext uri="{FF2B5EF4-FFF2-40B4-BE49-F238E27FC236}">
-                  <a16:creationId xmlns:a16="http://schemas.microsoft.com/office/drawing/2014/main" id="{749D865D-6143-06A5-26C2-D61B2C98158C}"/>
-                </a:ext>
-              </a:extLst>
-            </p:cNvPr>
-            <p:cNvSpPr/>
-            <p:nvPr/>
-          </p:nvSpPr>
-          <p:spPr>
-            <a:xfrm>
-              <a:off x="2067600" y="1281145"/>
-              <a:ext cx="1800000" cy="1260000"/>
-            </a:xfrm>
-            <a:prstGeom prst="roundRect">
-              <a:avLst>
-                <a:gd name="adj" fmla="val 21741"/>
-              </a:avLst>
-            </a:prstGeom>
-            <a:solidFill>
-              <a:schemeClr val="tx1">
-                <a:lumMod val="65000"/>
-                <a:lumOff val="35000"/>
-              </a:schemeClr>
-            </a:solidFill>
-            <a:ln>
-              <a:noFill/>
-            </a:ln>
-            <a:effectLst>
-              <a:outerShdw blurRad="50800" dist="38100" dir="13500000" algn="br" rotWithShape="0">
-                <a:prstClr val="black">
-                  <a:alpha val="40000"/>
-                </a:prstClr>
-              </a:outerShdw>
-            </a:effectLst>
-          </p:spPr>
-          <p:style>
-            <a:lnRef idx="2">
-              <a:schemeClr val="accent1">
-                <a:shade val="15000"/>
-              </a:schemeClr>
-            </a:lnRef>
-            <a:fillRef idx="1">
-              <a:schemeClr val="accent1"/>
-            </a:fillRef>
-            <a:effectRef idx="0">
-              <a:schemeClr val="accent1"/>
-            </a:effectRef>
-            <a:fontRef idx="minor">
-              <a:schemeClr val="lt1"/>
-            </a:fontRef>
-          </p:style>
-          <p:txBody>
-            <a:bodyPr rtlCol="0" anchor="ctr"/>
-            <a:lstStyle/>
-            <a:p>
-              <a:pPr algn="ctr"/>
-              <a:endParaRPr lang="en-MY"/>
-            </a:p>
-          </p:txBody>
-        </p:sp>
-        <p:sp>
-          <p:nvSpPr>
-            <p:cNvPr id="33" name="Rectangle: Rounded Corners 32">
-              <a:extLst>
-                <a:ext uri="{FF2B5EF4-FFF2-40B4-BE49-F238E27FC236}">
-                  <a16:creationId xmlns:a16="http://schemas.microsoft.com/office/drawing/2014/main" id="{E68BFF2A-1510-E78F-D523-B52656FDC783}"/>
                 </a:ext>
               </a:extLst>
             </p:cNvPr>
